--- a/curso_es/pptx/S70.pptx
+++ b/curso_es/pptx/S70.pptx
@@ -4164,7 +4164,7 @@
                 </a:solidFill>
                 <a:latin typeface="Nunito Sans"/>
               </a:rPr>
-              <a:t>Omar se cae de la bici y su móvil se rompe: no enciende. Lo usa para hablar con su familia cuando vuelve tarde de entrenar.</a:t>
+              <a:t>Un chico se cae de la bici y su móvil se rompe: no enciende. Lo usa para hablar con su familia cuando vuelve tarde de entrenar.</a:t>
             </a:r>
           </a:p>
         </p:txBody>
@@ -6520,7 +6520,7 @@
                 </a:solidFill>
                 <a:latin typeface="Nunito Sans"/>
               </a:rPr>
-              <a:t>En el campamento de Sherif, un objetivo ______ acercó a los dos grupos enfrentados.  (sesión 65)</a:t>
+              <a:t>En el campamento de los dos equipos, un objetivo ______ acercó a los dos grupos enfrentados.  (sesión 65)</a:t>
             </a:r>
           </a:p>
         </p:txBody>
@@ -6758,7 +6758,7 @@
                 </a:solidFill>
                 <a:latin typeface="Nunito Sans"/>
               </a:rPr>
-              <a:t>En el campamento de Sherif, un objetivo </a:t>
+              <a:t>En el campamento de los dos equipos, un objetivo </a:t>
             </a:r>
             <a:r>
               <a:rPr sz="2600" b="1">
@@ -6923,7 +6923,7 @@
                 </a:solidFill>
                 <a:latin typeface="Nunito Sans"/>
               </a:rPr>
-              <a:t>Iker dice: «Necesito las zapatillas nuevas que salen en TikTok». Las suyas tienen tres meses y están bien.</a:t>
+              <a:t>Un chico dice: «Necesito las zapatillas nuevas que salen en TikTok». Las suyas tienen tres meses y están bien.</a:t>
             </a:r>
           </a:p>
         </p:txBody>
